--- a/examples/tourism/out/deck.pptx
+++ b/examples/tourism/out/deck.pptx
@@ -325,7 +325,7 @@
             <a:pPr>
               <a:defRPr sz="1100">
                 <a:solidFill>
-                  <a:srgbClr val="8A8A8A"/>
+                  <a:srgbClr val="727272"/>
                 </a:solidFill>
               </a:defRPr>
             </a:pPr>
@@ -4717,7 +4717,7 @@
             <a:r>
               <a:rPr sz="1000" b="0">
                 <a:solidFill>
-                  <a:srgbClr val="8A8A8A"/>
+                  <a:srgbClr val="727272"/>
                 </a:solidFill>
                 <a:latin typeface="思源宋体"/>
                 <a:ea typeface="思源宋体"/>
@@ -7345,7 +7345,7 @@
             <a:r>
               <a:rPr sz="1000" b="0">
                 <a:solidFill>
-                  <a:srgbClr val="8A8A8A"/>
+                  <a:srgbClr val="727272"/>
                 </a:solidFill>
                 <a:latin typeface="思源宋体"/>
                 <a:ea typeface="思源宋体"/>
